--- a/pic/adoption_logos/adoption.pptx
+++ b/pic/adoption_logos/adoption.pptx
@@ -7,7 +7,7 @@
   <p:sldIdLst>
     <p:sldId id="256" r:id="rId2"/>
   </p:sldIdLst>
-  <p:sldSz cx="12192000" cy="6858000"/>
+  <p:sldSz cx="10162000" cy="3940000"/>
   <p:notesSz cx="6858000" cy="9144000"/>
   <p:defaultTextStyle>
     <a:defPPr>
@@ -3349,7 +3349,7 @@
         </p:blipFill>
         <p:spPr>
           <a:xfrm>
-            <a:off x="5627338" y="582995"/>
+            <a:off x="5627338" y="147995"/>
             <a:ext cx="2697824" cy="468000"/>
           </a:xfrm>
           <a:prstGeom prst="rect">
@@ -3380,7 +3380,7 @@
         </p:blipFill>
         <p:spPr>
           <a:xfrm>
-            <a:off x="2761381" y="658826"/>
+            <a:off x="2761381" y="223826"/>
             <a:ext cx="2731298" cy="360000"/>
           </a:xfrm>
           <a:prstGeom prst="rect">
@@ -3410,7 +3410,7 @@
         </p:blipFill>
         <p:spPr>
           <a:xfrm>
-            <a:off x="324266" y="1365111"/>
+            <a:off x="324266" y="930111"/>
             <a:ext cx="1524774" cy="468000"/>
           </a:xfrm>
           <a:prstGeom prst="rect">
@@ -3440,7 +3440,7 @@
         </p:blipFill>
         <p:spPr>
           <a:xfrm>
-            <a:off x="8459821" y="614442"/>
+            <a:off x="8459821" y="179442"/>
             <a:ext cx="1497493" cy="432000"/>
           </a:xfrm>
           <a:prstGeom prst="rect">
@@ -3471,7 +3471,7 @@
         </p:blipFill>
         <p:spPr>
           <a:xfrm>
-            <a:off x="204464" y="654995"/>
+            <a:off x="204464" y="219995"/>
             <a:ext cx="2450710" cy="360000"/>
           </a:xfrm>
           <a:prstGeom prst="rect">
@@ -3502,7 +3502,7 @@
         </p:blipFill>
         <p:spPr>
           <a:xfrm>
-            <a:off x="2356325" y="1365111"/>
+            <a:off x="2356325" y="930111"/>
             <a:ext cx="1961345" cy="468000"/>
           </a:xfrm>
           <a:prstGeom prst="rect">
@@ -3525,7 +3525,7 @@
           <p:nvPr/>
         </p:nvPicPr>
         <p:blipFill>
-          <a:blip>
+          <a:blip r:embed="rId24">
             <a:extLst>
               <a:ext uri="{96DAC541-7B7A-43D3-8B79-37D633B846F1}">
                 <asvg:svgBlip xmlns:asvg="http://schemas.microsoft.com/office/drawing/2016/SVG/main" r:embed="rId8"/>
@@ -3539,7 +3539,7 @@
         </p:blipFill>
         <p:spPr>
           <a:xfrm>
-            <a:off x="4824955" y="1365111"/>
+            <a:off x="4824955" y="930111"/>
             <a:ext cx="2066676" cy="468000"/>
           </a:xfrm>
           <a:prstGeom prst="rect">
@@ -3562,7 +3562,7 @@
           <p:nvPr/>
         </p:nvPicPr>
         <p:blipFill>
-          <a:blip>
+          <a:blip r:embed="rId25">
             <a:extLst>
               <a:ext uri="{96DAC541-7B7A-43D3-8B79-37D633B846F1}">
                 <asvg:svgBlip xmlns:asvg="http://schemas.microsoft.com/office/drawing/2016/SVG/main" r:embed="rId9"/>
@@ -3575,7 +3575,7 @@
         </p:blipFill>
         <p:spPr>
           <a:xfrm>
-            <a:off x="7398915" y="1365111"/>
+            <a:off x="7398915" y="930111"/>
             <a:ext cx="2558399" cy="468000"/>
           </a:xfrm>
           <a:prstGeom prst="rect">
@@ -3605,7 +3605,7 @@
         </p:blipFill>
         <p:spPr>
           <a:xfrm>
-            <a:off x="324266" y="2179396"/>
+            <a:off x="324266" y="1744396"/>
             <a:ext cx="1485391" cy="468000"/>
           </a:xfrm>
           <a:prstGeom prst="rect">
@@ -3636,7 +3636,7 @@
         </p:blipFill>
         <p:spPr>
           <a:xfrm>
-            <a:off x="2575001" y="2179396"/>
+            <a:off x="2575001" y="1744396"/>
             <a:ext cx="963953" cy="468000"/>
           </a:xfrm>
           <a:prstGeom prst="rect">
@@ -3667,7 +3667,7 @@
         </p:blipFill>
         <p:spPr>
           <a:xfrm>
-            <a:off x="4304298" y="2179396"/>
+            <a:off x="4304298" y="1744396"/>
             <a:ext cx="1648048" cy="468000"/>
           </a:xfrm>
           <a:prstGeom prst="rect">
@@ -3698,7 +3698,7 @@
         </p:blipFill>
         <p:spPr>
           <a:xfrm>
-            <a:off x="6717690" y="2179396"/>
+            <a:off x="6717690" y="1744396"/>
             <a:ext cx="516632" cy="468000"/>
           </a:xfrm>
           <a:prstGeom prst="rect">
@@ -3735,7 +3735,7 @@
         </p:blipFill>
         <p:spPr bwMode="auto">
           <a:xfrm>
-            <a:off x="7999667" y="2179396"/>
+            <a:off x="7999667" y="1744396"/>
             <a:ext cx="1957647" cy="468000"/>
           </a:xfrm>
           <a:prstGeom prst="rect">
@@ -3782,7 +3782,7 @@
         </p:blipFill>
         <p:spPr bwMode="auto">
           <a:xfrm>
-            <a:off x="324266" y="2923349"/>
+            <a:off x="324266" y="2488349"/>
             <a:ext cx="1848368" cy="468000"/>
           </a:xfrm>
           <a:prstGeom prst="rect">
@@ -3829,7 +3829,7 @@
         </p:blipFill>
         <p:spPr bwMode="auto">
           <a:xfrm>
-            <a:off x="2723343" y="2923349"/>
+            <a:off x="2723343" y="2488349"/>
             <a:ext cx="3167163" cy="468000"/>
           </a:xfrm>
           <a:prstGeom prst="rect">
@@ -3869,7 +3869,7 @@
         </p:blipFill>
         <p:spPr>
           <a:xfrm>
-            <a:off x="6333641" y="2923349"/>
+            <a:off x="6333641" y="2488349"/>
             <a:ext cx="1448000" cy="468000"/>
           </a:xfrm>
           <a:prstGeom prst="rect">
@@ -3906,7 +3906,7 @@
         </p:blipFill>
         <p:spPr bwMode="auto">
           <a:xfrm>
-            <a:off x="8167607" y="2923349"/>
+            <a:off x="8167607" y="2488349"/>
             <a:ext cx="1789707" cy="468000"/>
           </a:xfrm>
           <a:prstGeom prst="rect">
@@ -3953,7 +3953,7 @@
         </p:blipFill>
         <p:spPr bwMode="auto">
           <a:xfrm>
-            <a:off x="324266" y="3691397"/>
+            <a:off x="324266" y="3256397"/>
             <a:ext cx="918453" cy="468000"/>
           </a:xfrm>
           <a:prstGeom prst="rect">
@@ -3993,7 +3993,7 @@
         </p:blipFill>
         <p:spPr>
           <a:xfrm>
-            <a:off x="2001243" y="3637672"/>
+            <a:off x="1521938" y="3202672"/>
             <a:ext cx="874303" cy="575450"/>
           </a:xfrm>
           <a:prstGeom prst="rect">
@@ -4024,7 +4024,7 @@
         </p:blipFill>
         <p:spPr>
           <a:xfrm>
-            <a:off x="3634070" y="3673397"/>
+            <a:off x="2675461" y="3238397"/>
             <a:ext cx="1576512" cy="504000"/>
           </a:xfrm>
           <a:prstGeom prst="rect">
@@ -4055,7 +4055,7 @@
         </p:blipFill>
         <p:spPr>
           <a:xfrm>
-            <a:off x="5969106" y="3691397"/>
+            <a:off x="4531192" y="3256397"/>
             <a:ext cx="2021451" cy="468000"/>
           </a:xfrm>
           <a:prstGeom prst="rect">
@@ -4086,8 +4086,38 @@
         </p:blipFill>
         <p:spPr>
           <a:xfrm>
-            <a:off x="8749082" y="3691397"/>
+            <a:off x="6831863" y="3256397"/>
             <a:ext cx="1208232" cy="468000"/>
+          </a:xfrm>
+          <a:prstGeom prst="rect">
+            <a:avLst/>
+          </a:prstGeom>
+        </p:spPr>
+      </p:pic>
+      <p:pic>
+        <p:nvPicPr>
+          <p:cNvPr id="100" name="Biren Technology" descr="壁仞科技 / BIREN TECHNOLOGY"/>
+          <p:cNvPicPr>
+            <a:picLocks noChangeAspect="1"/>
+          </p:cNvPicPr>
+          <p:nvPr/>
+        </p:nvPicPr>
+        <p:blipFill>
+          <a:blip r:embed="rId27">
+            <a:extLst>
+              <a:ext uri="{96DAC541-7B7A-43D3-8B79-37D633B846F1}">
+                <asvg:svgBlip xmlns:asvg="http://schemas.microsoft.com/office/drawing/2016/SVG/main" r:embed="rId26"/>
+              </a:ext>
+            </a:extLst>
+          </a:blip>
+          <a:stretch>
+            <a:fillRect/>
+          </a:stretch>
+        </p:blipFill>
+        <p:spPr>
+          <a:xfrm>
+            <a:off x="8319314" y="3256397"/>
+            <a:ext cx="1638000" cy="468000"/>
           </a:xfrm>
           <a:prstGeom prst="rect">
             <a:avLst/>

--- a/pic/adoption_logos/adoption.pptx
+++ b/pic/adoption_logos/adoption.pptx
@@ -5,9 +5,9 @@
     <p:sldMasterId id="2147483648" r:id="rId1"/>
   </p:sldMasterIdLst>
   <p:sldIdLst>
-    <p:sldId id="256" r:id="rId2"/>
+    <p:sldId id="257" r:id="rId2"/>
   </p:sldIdLst>
-  <p:sldSz cx="10162000" cy="3940000"/>
+  <p:sldSz cx="10161588" cy="3940175"/>
   <p:notesSz cx="6858000" cy="9144000"/>
   <p:defaultTextStyle>
     <a:defPPr>
@@ -259,7 +259,7 @@
           <a:p>
             <a:fld id="{8E119A9B-EC2C-F046-AB6F-3B9C9A28D3EB}" type="datetimeFigureOut">
               <a:rPr kumimoji="1" lang="zh-CN" altLang="en-US" smtClean="0"/>
-              <a:t>2026/7/23</a:t>
+              <a:t>2026/9/22</a:t>
             </a:fld>
             <a:endParaRPr kumimoji="1" lang="zh-CN" altLang="en-US"/>
           </a:p>
@@ -457,7 +457,7 @@
           <a:p>
             <a:fld id="{8E119A9B-EC2C-F046-AB6F-3B9C9A28D3EB}" type="datetimeFigureOut">
               <a:rPr kumimoji="1" lang="zh-CN" altLang="en-US" smtClean="0"/>
-              <a:t>2026/7/23</a:t>
+              <a:t>2026/9/22</a:t>
             </a:fld>
             <a:endParaRPr kumimoji="1" lang="zh-CN" altLang="en-US"/>
           </a:p>
@@ -665,7 +665,7 @@
           <a:p>
             <a:fld id="{8E119A9B-EC2C-F046-AB6F-3B9C9A28D3EB}" type="datetimeFigureOut">
               <a:rPr kumimoji="1" lang="zh-CN" altLang="en-US" smtClean="0"/>
-              <a:t>2026/7/23</a:t>
+              <a:t>2026/9/22</a:t>
             </a:fld>
             <a:endParaRPr kumimoji="1" lang="zh-CN" altLang="en-US"/>
           </a:p>
@@ -863,7 +863,7 @@
           <a:p>
             <a:fld id="{8E119A9B-EC2C-F046-AB6F-3B9C9A28D3EB}" type="datetimeFigureOut">
               <a:rPr kumimoji="1" lang="zh-CN" altLang="en-US" smtClean="0"/>
-              <a:t>2026/7/23</a:t>
+              <a:t>2026/9/22</a:t>
             </a:fld>
             <a:endParaRPr kumimoji="1" lang="zh-CN" altLang="en-US"/>
           </a:p>
@@ -1138,7 +1138,7 @@
           <a:p>
             <a:fld id="{8E119A9B-EC2C-F046-AB6F-3B9C9A28D3EB}" type="datetimeFigureOut">
               <a:rPr kumimoji="1" lang="zh-CN" altLang="en-US" smtClean="0"/>
-              <a:t>2026/7/23</a:t>
+              <a:t>2026/9/22</a:t>
             </a:fld>
             <a:endParaRPr kumimoji="1" lang="zh-CN" altLang="en-US"/>
           </a:p>
@@ -1403,7 +1403,7 @@
           <a:p>
             <a:fld id="{8E119A9B-EC2C-F046-AB6F-3B9C9A28D3EB}" type="datetimeFigureOut">
               <a:rPr kumimoji="1" lang="zh-CN" altLang="en-US" smtClean="0"/>
-              <a:t>2026/7/23</a:t>
+              <a:t>2026/9/22</a:t>
             </a:fld>
             <a:endParaRPr kumimoji="1" lang="zh-CN" altLang="en-US"/>
           </a:p>
@@ -1815,7 +1815,7 @@
           <a:p>
             <a:fld id="{8E119A9B-EC2C-F046-AB6F-3B9C9A28D3EB}" type="datetimeFigureOut">
               <a:rPr kumimoji="1" lang="zh-CN" altLang="en-US" smtClean="0"/>
-              <a:t>2026/7/23</a:t>
+              <a:t>2026/9/22</a:t>
             </a:fld>
             <a:endParaRPr kumimoji="1" lang="zh-CN" altLang="en-US"/>
           </a:p>
@@ -1956,7 +1956,7 @@
           <a:p>
             <a:fld id="{8E119A9B-EC2C-F046-AB6F-3B9C9A28D3EB}" type="datetimeFigureOut">
               <a:rPr kumimoji="1" lang="zh-CN" altLang="en-US" smtClean="0"/>
-              <a:t>2026/7/23</a:t>
+              <a:t>2026/9/22</a:t>
             </a:fld>
             <a:endParaRPr kumimoji="1" lang="zh-CN" altLang="en-US"/>
           </a:p>
@@ -2069,7 +2069,7 @@
           <a:p>
             <a:fld id="{8E119A9B-EC2C-F046-AB6F-3B9C9A28D3EB}" type="datetimeFigureOut">
               <a:rPr kumimoji="1" lang="zh-CN" altLang="en-US" smtClean="0"/>
-              <a:t>2026/7/23</a:t>
+              <a:t>2026/9/22</a:t>
             </a:fld>
             <a:endParaRPr kumimoji="1" lang="zh-CN" altLang="en-US"/>
           </a:p>
@@ -2380,7 +2380,7 @@
           <a:p>
             <a:fld id="{8E119A9B-EC2C-F046-AB6F-3B9C9A28D3EB}" type="datetimeFigureOut">
               <a:rPr kumimoji="1" lang="zh-CN" altLang="en-US" smtClean="0"/>
-              <a:t>2026/7/23</a:t>
+              <a:t>2026/9/22</a:t>
             </a:fld>
             <a:endParaRPr kumimoji="1" lang="zh-CN" altLang="en-US"/>
           </a:p>
@@ -2668,7 +2668,7 @@
           <a:p>
             <a:fld id="{8E119A9B-EC2C-F046-AB6F-3B9C9A28D3EB}" type="datetimeFigureOut">
               <a:rPr kumimoji="1" lang="zh-CN" altLang="en-US" smtClean="0"/>
-              <a:t>2026/7/23</a:t>
+              <a:t>2026/9/22</a:t>
             </a:fld>
             <a:endParaRPr kumimoji="1" lang="zh-CN" altLang="en-US"/>
           </a:p>
@@ -2909,7 +2909,7 @@
           <a:p>
             <a:fld id="{8E119A9B-EC2C-F046-AB6F-3B9C9A28D3EB}" type="datetimeFigureOut">
               <a:rPr kumimoji="1" lang="zh-CN" altLang="en-US" smtClean="0"/>
-              <a:t>2026/7/23</a:t>
+              <a:t>2026/9/22</a:t>
             </a:fld>
             <a:endParaRPr kumimoji="1" lang="zh-CN" altLang="en-US"/>
           </a:p>
@@ -3314,7 +3314,13 @@
   <p:cSld>
     <p:spTree>
       <p:nvGrpSpPr>
-        <p:cNvPr id="1" name=""/>
+        <p:cNvPr id="1" name="">
+          <a:extLst>
+            <a:ext uri="{FF2B5EF4-FFF2-40B4-BE49-F238E27FC236}">
+              <a16:creationId xmlns:a16="http://schemas.microsoft.com/office/drawing/2014/main" id="{D3D7C9E2-37BD-A3A1-D839-9E5F26CBB7BE}"/>
+            </a:ext>
+          </a:extLst>
+        </p:cNvPr>
         <p:cNvGrpSpPr/>
         <p:nvPr/>
       </p:nvGrpSpPr>
@@ -3331,7 +3337,7 @@
           <p:cNvPr id="5" name="图片 4">
             <a:extLst>
               <a:ext uri="{FF2B5EF4-FFF2-40B4-BE49-F238E27FC236}">
-                <a16:creationId xmlns:a16="http://schemas.microsoft.com/office/drawing/2014/main" id="{6EB0309D-8104-200B-9E07-E367F7E9AB62}"/>
+                <a16:creationId xmlns:a16="http://schemas.microsoft.com/office/drawing/2014/main" id="{7B0E3F2B-EAC0-41A7-D5C9-8BE08E995F4C}"/>
               </a:ext>
             </a:extLst>
           </p:cNvPr>
@@ -3349,8 +3355,8 @@
         </p:blipFill>
         <p:spPr>
           <a:xfrm>
-            <a:off x="5627338" y="147995"/>
-            <a:ext cx="2697824" cy="468000"/>
+            <a:off x="3648571" y="1844470"/>
+            <a:ext cx="2782577" cy="482702"/>
           </a:xfrm>
           <a:prstGeom prst="rect">
             <a:avLst/>
@@ -3362,7 +3368,7 @@
           <p:cNvPr id="9" name="图片 8">
             <a:extLst>
               <a:ext uri="{FF2B5EF4-FFF2-40B4-BE49-F238E27FC236}">
-                <a16:creationId xmlns:a16="http://schemas.microsoft.com/office/drawing/2014/main" id="{D786DBC9-111F-9FB1-46A9-32113F806B24}"/>
+                <a16:creationId xmlns:a16="http://schemas.microsoft.com/office/drawing/2014/main" id="{51DF1278-3C8B-71D8-5533-812FD07094F6}"/>
               </a:ext>
             </a:extLst>
           </p:cNvPr>
@@ -3380,8 +3386,8 @@
         </p:blipFill>
         <p:spPr>
           <a:xfrm>
-            <a:off x="2761381" y="223826"/>
-            <a:ext cx="2731298" cy="360000"/>
+            <a:off x="240830" y="2594010"/>
+            <a:ext cx="2404578" cy="316936"/>
           </a:xfrm>
           <a:prstGeom prst="rect">
             <a:avLst/>
@@ -3393,7 +3399,7 @@
           <p:cNvPr id="13" name="图片 12">
             <a:extLst>
               <a:ext uri="{FF2B5EF4-FFF2-40B4-BE49-F238E27FC236}">
-                <a16:creationId xmlns:a16="http://schemas.microsoft.com/office/drawing/2014/main" id="{62A720D6-E24D-C300-69B3-9BED8913545A}"/>
+                <a16:creationId xmlns:a16="http://schemas.microsoft.com/office/drawing/2014/main" id="{A9420AFE-950E-8A03-DC70-B87B004144E4}"/>
               </a:ext>
             </a:extLst>
           </p:cNvPr>
@@ -3410,8 +3416,8 @@
         </p:blipFill>
         <p:spPr>
           <a:xfrm>
-            <a:off x="324266" y="930111"/>
-            <a:ext cx="1524774" cy="468000"/>
+            <a:off x="5817322" y="838258"/>
+            <a:ext cx="1907087" cy="585344"/>
           </a:xfrm>
           <a:prstGeom prst="rect">
             <a:avLst/>
@@ -3423,7 +3429,7 @@
           <p:cNvPr id="15" name="图片 14">
             <a:extLst>
               <a:ext uri="{FF2B5EF4-FFF2-40B4-BE49-F238E27FC236}">
-                <a16:creationId xmlns:a16="http://schemas.microsoft.com/office/drawing/2014/main" id="{13C43218-0962-6866-FA66-9214F47D211D}"/>
+                <a16:creationId xmlns:a16="http://schemas.microsoft.com/office/drawing/2014/main" id="{F1779EB8-48AB-E8B3-5B0E-7AC6786ED2AF}"/>
               </a:ext>
             </a:extLst>
           </p:cNvPr>
@@ -3440,8 +3446,8 @@
         </p:blipFill>
         <p:spPr>
           <a:xfrm>
-            <a:off x="8459821" y="179442"/>
-            <a:ext cx="1497493" cy="432000"/>
+            <a:off x="6871730" y="1857034"/>
+            <a:ext cx="1586143" cy="457574"/>
           </a:xfrm>
           <a:prstGeom prst="rect">
             <a:avLst/>
@@ -3450,10 +3456,10 @@
       </p:pic>
       <p:pic>
         <p:nvPicPr>
-          <p:cNvPr id="17" name="图片 16">
-            <a:extLst>
-              <a:ext uri="{FF2B5EF4-FFF2-40B4-BE49-F238E27FC236}">
-                <a16:creationId xmlns:a16="http://schemas.microsoft.com/office/drawing/2014/main" id="{32102840-5AA3-83DC-2EA8-C1E2A255BA41}"/>
+          <p:cNvPr id="3" name="图片 2">
+            <a:extLst>
+              <a:ext uri="{FF2B5EF4-FFF2-40B4-BE49-F238E27FC236}">
+                <a16:creationId xmlns:a16="http://schemas.microsoft.com/office/drawing/2014/main" id="{2B8FF781-B594-06CD-EC4A-9CF8D0C627E5}"/>
               </a:ext>
             </a:extLst>
           </p:cNvPr>
@@ -3464,15 +3470,15 @@
         </p:nvPicPr>
         <p:blipFill>
           <a:blip r:embed="rId6"/>
-          <a:srcRect t="23986" b="19317"/>
+          <a:srcRect l="11371" t="34670" r="12418" b="38022"/>
           <a:stretch>
             <a:fillRect/>
           </a:stretch>
         </p:blipFill>
         <p:spPr>
           <a:xfrm>
-            <a:off x="204464" y="219995"/>
-            <a:ext cx="2450710" cy="360000"/>
+            <a:off x="3407996" y="879080"/>
+            <a:ext cx="2110965" cy="503701"/>
           </a:xfrm>
           <a:prstGeom prst="rect">
             <a:avLst/>
@@ -3481,10 +3487,10 @@
       </p:pic>
       <p:pic>
         <p:nvPicPr>
-          <p:cNvPr id="3" name="图片 2">
-            <a:extLst>
-              <a:ext uri="{FF2B5EF4-FFF2-40B4-BE49-F238E27FC236}">
-                <a16:creationId xmlns:a16="http://schemas.microsoft.com/office/drawing/2014/main" id="{831790C4-D082-6E8F-5B7A-7A1A34264729}"/>
+          <p:cNvPr id="4" name="图形 3">
+            <a:extLst>
+              <a:ext uri="{FF2B5EF4-FFF2-40B4-BE49-F238E27FC236}">
+                <a16:creationId xmlns:a16="http://schemas.microsoft.com/office/drawing/2014/main" id="{35542273-356E-C07F-8208-864BD951F6D0}"/>
               </a:ext>
             </a:extLst>
           </p:cNvPr>
@@ -3494,41 +3500,10 @@
           <p:nvPr/>
         </p:nvPicPr>
         <p:blipFill>
-          <a:blip r:embed="rId7"/>
-          <a:srcRect l="11371" t="34670" r="12418" b="38022"/>
-          <a:stretch>
-            <a:fillRect/>
-          </a:stretch>
-        </p:blipFill>
-        <p:spPr>
-          <a:xfrm>
-            <a:off x="2356325" y="930111"/>
-            <a:ext cx="1961345" cy="468000"/>
-          </a:xfrm>
-          <a:prstGeom prst="rect">
-            <a:avLst/>
-          </a:prstGeom>
-        </p:spPr>
-      </p:pic>
-      <p:pic>
-        <p:nvPicPr>
-          <p:cNvPr id="4" name="图形 3">
-            <a:extLst>
-              <a:ext uri="{FF2B5EF4-FFF2-40B4-BE49-F238E27FC236}">
-                <a16:creationId xmlns:a16="http://schemas.microsoft.com/office/drawing/2014/main" id="{84EE99EC-71FF-F3E3-348F-52E1D05CF987}"/>
-              </a:ext>
-            </a:extLst>
-          </p:cNvPr>
-          <p:cNvPicPr>
-            <a:picLocks noChangeAspect="1"/>
-          </p:cNvPicPr>
-          <p:nvPr/>
-        </p:nvPicPr>
-        <p:blipFill>
-          <a:blip r:embed="rId24">
+          <a:blip>
             <a:extLst>
               <a:ext uri="{96DAC541-7B7A-43D3-8B79-37D633B846F1}">
-                <asvg:svgBlip xmlns:asvg="http://schemas.microsoft.com/office/drawing/2016/SVG/main" r:embed="rId8"/>
+                <asvg:svgBlip xmlns:asvg="http://schemas.microsoft.com/office/drawing/2016/SVG/main" r:embed="rId7"/>
               </a:ext>
             </a:extLst>
           </a:blip>
@@ -3539,8 +3514,8 @@
         </p:blipFill>
         <p:spPr>
           <a:xfrm>
-            <a:off x="4824955" y="930111"/>
-            <a:ext cx="2066676" cy="468000"/>
+            <a:off x="3482304" y="131607"/>
+            <a:ext cx="2224351" cy="503706"/>
           </a:xfrm>
           <a:prstGeom prst="rect">
             <a:avLst/>
@@ -3552,7 +3527,7 @@
           <p:cNvPr id="7" name="图形 6">
             <a:extLst>
               <a:ext uri="{FF2B5EF4-FFF2-40B4-BE49-F238E27FC236}">
-                <a16:creationId xmlns:a16="http://schemas.microsoft.com/office/drawing/2014/main" id="{4269FE35-C4B8-7154-6E5C-11728C946E1A}"/>
+                <a16:creationId xmlns:a16="http://schemas.microsoft.com/office/drawing/2014/main" id="{468CC0A1-702E-C3A0-5E58-F953FA1EFDD5}"/>
               </a:ext>
             </a:extLst>
           </p:cNvPr>
@@ -3562,10 +3537,10 @@
           <p:nvPr/>
         </p:nvPicPr>
         <p:blipFill>
-          <a:blip r:embed="rId25">
+          <a:blip>
             <a:extLst>
               <a:ext uri="{96DAC541-7B7A-43D3-8B79-37D633B846F1}">
-                <asvg:svgBlip xmlns:asvg="http://schemas.microsoft.com/office/drawing/2016/SVG/main" r:embed="rId9"/>
+                <asvg:svgBlip xmlns:asvg="http://schemas.microsoft.com/office/drawing/2016/SVG/main" r:embed="rId8"/>
               </a:ext>
             </a:extLst>
           </a:blip>
@@ -3575,8 +3550,8 @@
         </p:blipFill>
         <p:spPr>
           <a:xfrm>
-            <a:off x="7398915" y="930111"/>
-            <a:ext cx="2558399" cy="468000"/>
+            <a:off x="279128" y="167032"/>
+            <a:ext cx="2366279" cy="432856"/>
           </a:xfrm>
           <a:prstGeom prst="rect">
             <a:avLst/>
@@ -3588,7 +3563,37 @@
           <p:cNvPr id="11" name="图片 10">
             <a:extLst>
               <a:ext uri="{FF2B5EF4-FFF2-40B4-BE49-F238E27FC236}">
-                <a16:creationId xmlns:a16="http://schemas.microsoft.com/office/drawing/2014/main" id="{3F5F10CC-841A-A4AB-F381-D9ECD445F9C8}"/>
+                <a16:creationId xmlns:a16="http://schemas.microsoft.com/office/drawing/2014/main" id="{616ACE9B-DFC6-9AD6-FF52-F5D65CDC71CD}"/>
+              </a:ext>
+            </a:extLst>
+          </p:cNvPr>
+          <p:cNvPicPr>
+            <a:picLocks noChangeAspect="1"/>
+          </p:cNvPicPr>
+          <p:nvPr/>
+        </p:nvPicPr>
+        <p:blipFill>
+          <a:blip r:embed="rId9"/>
+          <a:stretch>
+            <a:fillRect/>
+          </a:stretch>
+        </p:blipFill>
+        <p:spPr>
+          <a:xfrm>
+            <a:off x="8268424" y="3280888"/>
+            <a:ext cx="1465605" cy="461766"/>
+          </a:xfrm>
+          <a:prstGeom prst="rect">
+            <a:avLst/>
+          </a:prstGeom>
+        </p:spPr>
+      </p:pic>
+      <p:pic>
+        <p:nvPicPr>
+          <p:cNvPr id="2" name="图片 1">
+            <a:extLst>
+              <a:ext uri="{FF2B5EF4-FFF2-40B4-BE49-F238E27FC236}">
+                <a16:creationId xmlns:a16="http://schemas.microsoft.com/office/drawing/2014/main" id="{149E893D-D482-6BEE-64DD-CEB19D1D116F}"/>
               </a:ext>
             </a:extLst>
           </p:cNvPr>
@@ -3599,14 +3604,15 @@
         </p:nvPicPr>
         <p:blipFill>
           <a:blip r:embed="rId10"/>
+          <a:srcRect l="13870" t="13758" r="14181" b="13385"/>
           <a:stretch>
             <a:fillRect/>
           </a:stretch>
         </p:blipFill>
         <p:spPr>
           <a:xfrm>
-            <a:off x="324266" y="1744396"/>
-            <a:ext cx="1485391" cy="468000"/>
+            <a:off x="279128" y="913333"/>
+            <a:ext cx="896384" cy="435195"/>
           </a:xfrm>
           <a:prstGeom prst="rect">
             <a:avLst/>
@@ -3615,10 +3621,10 @@
       </p:pic>
       <p:pic>
         <p:nvPicPr>
-          <p:cNvPr id="2" name="图片 1">
-            <a:extLst>
-              <a:ext uri="{FF2B5EF4-FFF2-40B4-BE49-F238E27FC236}">
-                <a16:creationId xmlns:a16="http://schemas.microsoft.com/office/drawing/2014/main" id="{99F77CDC-EAD5-9896-CC8B-7F9E766D235F}"/>
+          <p:cNvPr id="6" name="图片 5">
+            <a:extLst>
+              <a:ext uri="{FF2B5EF4-FFF2-40B4-BE49-F238E27FC236}">
+                <a16:creationId xmlns:a16="http://schemas.microsoft.com/office/drawing/2014/main" id="{26EF5807-AA05-59B9-A03F-B525DB7C9656}"/>
               </a:ext>
             </a:extLst>
           </p:cNvPr>
@@ -3629,15 +3635,15 @@
         </p:nvPicPr>
         <p:blipFill>
           <a:blip r:embed="rId11"/>
-          <a:srcRect l="13870" t="13758" r="14181" b="13385"/>
+          <a:srcRect l="3426" t="8849" r="5021" b="9599"/>
           <a:stretch>
             <a:fillRect/>
           </a:stretch>
         </p:blipFill>
         <p:spPr>
           <a:xfrm>
-            <a:off x="2575001" y="1744396"/>
-            <a:ext cx="963953" cy="468000"/>
+            <a:off x="5777012" y="3277771"/>
+            <a:ext cx="1648048" cy="468000"/>
           </a:xfrm>
           <a:prstGeom prst="rect">
             <a:avLst/>
@@ -3646,10 +3652,10 @@
       </p:pic>
       <p:pic>
         <p:nvPicPr>
-          <p:cNvPr id="6" name="图片 5">
-            <a:extLst>
-              <a:ext uri="{FF2B5EF4-FFF2-40B4-BE49-F238E27FC236}">
-                <a16:creationId xmlns:a16="http://schemas.microsoft.com/office/drawing/2014/main" id="{CCDC36FC-A42E-2E49-D21A-221942802DF7}"/>
+          <p:cNvPr id="14" name="图片 13">
+            <a:extLst>
+              <a:ext uri="{FF2B5EF4-FFF2-40B4-BE49-F238E27FC236}">
+                <a16:creationId xmlns:a16="http://schemas.microsoft.com/office/drawing/2014/main" id="{C0CA1160-36DA-51D0-E8DD-244E55C66C94}"/>
               </a:ext>
             </a:extLst>
           </p:cNvPr>
@@ -3660,37 +3666,6 @@
         </p:nvPicPr>
         <p:blipFill>
           <a:blip r:embed="rId12"/>
-          <a:srcRect l="3426" t="8849" r="5021" b="9599"/>
-          <a:stretch>
-            <a:fillRect/>
-          </a:stretch>
-        </p:blipFill>
-        <p:spPr>
-          <a:xfrm>
-            <a:off x="4304298" y="1744396"/>
-            <a:ext cx="1648048" cy="468000"/>
-          </a:xfrm>
-          <a:prstGeom prst="rect">
-            <a:avLst/>
-          </a:prstGeom>
-        </p:spPr>
-      </p:pic>
-      <p:pic>
-        <p:nvPicPr>
-          <p:cNvPr id="14" name="图片 13">
-            <a:extLst>
-              <a:ext uri="{FF2B5EF4-FFF2-40B4-BE49-F238E27FC236}">
-                <a16:creationId xmlns:a16="http://schemas.microsoft.com/office/drawing/2014/main" id="{F4D3A0D7-27AE-C3E5-E95B-68A220802F8F}"/>
-              </a:ext>
-            </a:extLst>
-          </p:cNvPr>
-          <p:cNvPicPr>
-            <a:picLocks noChangeAspect="1"/>
-          </p:cNvPicPr>
-          <p:nvPr/>
-        </p:nvPicPr>
-        <p:blipFill>
-          <a:blip r:embed="rId13"/>
           <a:srcRect l="14691" t="20375" r="19382" b="19905"/>
           <a:stretch>
             <a:fillRect/>
@@ -3698,8 +3673,8 @@
         </p:blipFill>
         <p:spPr>
           <a:xfrm>
-            <a:off x="6717690" y="1744396"/>
-            <a:ext cx="516632" cy="468000"/>
+            <a:off x="8898454" y="1793945"/>
+            <a:ext cx="588637" cy="533227"/>
           </a:xfrm>
           <a:prstGeom prst="rect">
             <a:avLst/>
@@ -3711,7 +3686,7 @@
           <p:cNvPr id="1026" name="Picture 2">
             <a:extLst>
               <a:ext uri="{FF2B5EF4-FFF2-40B4-BE49-F238E27FC236}">
-                <a16:creationId xmlns:a16="http://schemas.microsoft.com/office/drawing/2014/main" id="{5CCF0391-A786-7B3D-47FB-7B9C7B3DB4D2}"/>
+                <a16:creationId xmlns:a16="http://schemas.microsoft.com/office/drawing/2014/main" id="{9B386E92-2208-2880-31B2-B1736A4899CA}"/>
               </a:ext>
             </a:extLst>
           </p:cNvPr>
@@ -3721,7 +3696,7 @@
           <p:nvPr/>
         </p:nvPicPr>
         <p:blipFill>
-          <a:blip r:embed="rId14">
+          <a:blip r:embed="rId13">
             <a:extLst>
               <a:ext uri="{28A0092B-C50C-407E-A947-70E740481C1C}">
                 <a14:useLocalDpi xmlns:a14="http://schemas.microsoft.com/office/drawing/2010/main" val="0"/>
@@ -3735,8 +3710,8 @@
         </p:blipFill>
         <p:spPr bwMode="auto">
           <a:xfrm>
-            <a:off x="7999667" y="1744396"/>
-            <a:ext cx="1957647" cy="468000"/>
+            <a:off x="8231195" y="201202"/>
+            <a:ext cx="1524774" cy="364516"/>
           </a:xfrm>
           <a:prstGeom prst="rect">
             <a:avLst/>
@@ -3758,7 +3733,7 @@
           <p:cNvPr id="8" name="Picture 2" descr="高德地图logo">
             <a:extLst>
               <a:ext uri="{FF2B5EF4-FFF2-40B4-BE49-F238E27FC236}">
-                <a16:creationId xmlns:a16="http://schemas.microsoft.com/office/drawing/2014/main" id="{B7B45763-A296-20E5-096F-34F16D17E05F}"/>
+                <a16:creationId xmlns:a16="http://schemas.microsoft.com/office/drawing/2014/main" id="{F30FE727-A6AE-4A00-463D-3DFFA5C8A116}"/>
               </a:ext>
             </a:extLst>
           </p:cNvPr>
@@ -3768,7 +3743,7 @@
           <p:nvPr/>
         </p:nvPicPr>
         <p:blipFill rotWithShape="1">
-          <a:blip r:embed="rId15">
+          <a:blip r:embed="rId14">
             <a:extLst>
               <a:ext uri="{28A0092B-C50C-407E-A947-70E740481C1C}">
                 <a14:useLocalDpi xmlns:a14="http://schemas.microsoft.com/office/drawing/2010/main" val="0"/>
@@ -3782,7 +3757,7 @@
         </p:blipFill>
         <p:spPr bwMode="auto">
           <a:xfrm>
-            <a:off x="324266" y="2488349"/>
+            <a:off x="3121823" y="2518478"/>
             <a:ext cx="1848368" cy="468000"/>
           </a:xfrm>
           <a:prstGeom prst="rect">
@@ -3805,7 +3780,7 @@
           <p:cNvPr id="1028" name="Picture 4" descr="About - Vingroup Company">
             <a:extLst>
               <a:ext uri="{FF2B5EF4-FFF2-40B4-BE49-F238E27FC236}">
-                <a16:creationId xmlns:a16="http://schemas.microsoft.com/office/drawing/2014/main" id="{0A3329B4-47E5-2254-71B7-56FB36300D4F}"/>
+                <a16:creationId xmlns:a16="http://schemas.microsoft.com/office/drawing/2014/main" id="{E8C9CAE3-09E2-1033-3B07-EA7C0792ED7E}"/>
               </a:ext>
             </a:extLst>
           </p:cNvPr>
@@ -3815,7 +3790,7 @@
           <p:nvPr/>
         </p:nvPicPr>
         <p:blipFill>
-          <a:blip r:embed="rId16">
+          <a:blip r:embed="rId15">
             <a:extLst>
               <a:ext uri="{28A0092B-C50C-407E-A947-70E740481C1C}">
                 <a14:useLocalDpi xmlns:a14="http://schemas.microsoft.com/office/drawing/2010/main" val="0"/>
@@ -3829,8 +3804,8 @@
         </p:blipFill>
         <p:spPr bwMode="auto">
           <a:xfrm>
-            <a:off x="2723343" y="2488349"/>
-            <a:ext cx="3167163" cy="468000"/>
+            <a:off x="240829" y="1866598"/>
+            <a:ext cx="2967160" cy="438446"/>
           </a:xfrm>
           <a:prstGeom prst="rect">
             <a:avLst/>
@@ -3852,7 +3827,7 @@
           <p:cNvPr id="12" name="图片 11">
             <a:extLst>
               <a:ext uri="{FF2B5EF4-FFF2-40B4-BE49-F238E27FC236}">
-                <a16:creationId xmlns:a16="http://schemas.microsoft.com/office/drawing/2014/main" id="{2A27ED8F-264C-5776-AC9F-B9B3E945E297}"/>
+                <a16:creationId xmlns:a16="http://schemas.microsoft.com/office/drawing/2014/main" id="{43FC978A-CE97-C1BA-57B3-CF4C9FF3FB5C}"/>
               </a:ext>
             </a:extLst>
           </p:cNvPr>
@@ -3862,15 +3837,15 @@
           <p:nvPr/>
         </p:nvPicPr>
         <p:blipFill>
-          <a:blip r:embed="rId17"/>
+          <a:blip r:embed="rId16"/>
           <a:stretch>
             <a:fillRect/>
           </a:stretch>
         </p:blipFill>
         <p:spPr>
           <a:xfrm>
-            <a:off x="6333641" y="2488349"/>
-            <a:ext cx="1448000" cy="468000"/>
+            <a:off x="5446606" y="2543433"/>
+            <a:ext cx="1293579" cy="418090"/>
           </a:xfrm>
           <a:prstGeom prst="rect">
             <a:avLst/>
@@ -3882,7 +3857,7 @@
           <p:cNvPr id="18" name="Picture 4" descr="文档中心">
             <a:extLst>
               <a:ext uri="{FF2B5EF4-FFF2-40B4-BE49-F238E27FC236}">
-                <a16:creationId xmlns:a16="http://schemas.microsoft.com/office/drawing/2014/main" id="{95E91AB5-B259-7790-131C-49FEC7A3617F}"/>
+                <a16:creationId xmlns:a16="http://schemas.microsoft.com/office/drawing/2014/main" id="{45B50817-66A2-0F2D-5EC9-213978DF3F0E}"/>
               </a:ext>
             </a:extLst>
           </p:cNvPr>
@@ -3892,7 +3867,7 @@
           <p:nvPr/>
         </p:nvPicPr>
         <p:blipFill rotWithShape="1">
-          <a:blip r:embed="rId18">
+          <a:blip r:embed="rId17">
             <a:extLst>
               <a:ext uri="{28A0092B-C50C-407E-A947-70E740481C1C}">
                 <a14:useLocalDpi xmlns:a14="http://schemas.microsoft.com/office/drawing/2010/main" val="0"/>
@@ -3906,7 +3881,7 @@
         </p:blipFill>
         <p:spPr bwMode="auto">
           <a:xfrm>
-            <a:off x="8167607" y="2488349"/>
+            <a:off x="3143942" y="3277771"/>
             <a:ext cx="1789707" cy="468000"/>
           </a:xfrm>
           <a:prstGeom prst="rect">
@@ -3929,7 +3904,7 @@
           <p:cNvPr id="1030" name="Picture 6" descr="Vita Dynamics (Beijing) Technology Co., Ltd._Baiduwiki">
             <a:extLst>
               <a:ext uri="{FF2B5EF4-FFF2-40B4-BE49-F238E27FC236}">
-                <a16:creationId xmlns:a16="http://schemas.microsoft.com/office/drawing/2014/main" id="{3C7B266C-8953-1422-4099-4010888B79B7}"/>
+                <a16:creationId xmlns:a16="http://schemas.microsoft.com/office/drawing/2014/main" id="{28FD848C-4471-3686-FD6C-B8F97229DE91}"/>
               </a:ext>
             </a:extLst>
           </p:cNvPr>
@@ -3939,7 +3914,7 @@
           <p:nvPr/>
         </p:nvPicPr>
         <p:blipFill rotWithShape="1">
-          <a:blip r:embed="rId19">
+          <a:blip r:embed="rId18">
             <a:extLst>
               <a:ext uri="{28A0092B-C50C-407E-A947-70E740481C1C}">
                 <a14:useLocalDpi xmlns:a14="http://schemas.microsoft.com/office/drawing/2010/main" val="0"/>
@@ -3953,7 +3928,7 @@
         </p:blipFill>
         <p:spPr bwMode="auto">
           <a:xfrm>
-            <a:off x="324266" y="3256397"/>
+            <a:off x="8733547" y="2518478"/>
             <a:ext cx="918453" cy="468000"/>
           </a:xfrm>
           <a:prstGeom prst="rect">
@@ -3976,7 +3951,37 @@
           <p:cNvPr id="10" name="图片 9" descr="File:Intel logo (2006-2020).svg - Wikimedia Commons">
             <a:extLst>
               <a:ext uri="{FF2B5EF4-FFF2-40B4-BE49-F238E27FC236}">
-                <a16:creationId xmlns:a16="http://schemas.microsoft.com/office/drawing/2014/main" id="{996C534F-D070-6C9D-52CA-822D9CD647E8}"/>
+                <a16:creationId xmlns:a16="http://schemas.microsoft.com/office/drawing/2014/main" id="{7D01A70D-3C7A-A52E-D1D2-14886AA069F1}"/>
+              </a:ext>
+            </a:extLst>
+          </p:cNvPr>
+          <p:cNvPicPr>
+            <a:picLocks noChangeAspect="1"/>
+          </p:cNvPicPr>
+          <p:nvPr/>
+        </p:nvPicPr>
+        <p:blipFill>
+          <a:blip r:embed="rId19"/>
+          <a:stretch>
+            <a:fillRect/>
+          </a:stretch>
+        </p:blipFill>
+        <p:spPr>
+          <a:xfrm>
+            <a:off x="6543552" y="103488"/>
+            <a:ext cx="850746" cy="559945"/>
+          </a:xfrm>
+          <a:prstGeom prst="rect">
+            <a:avLst/>
+          </a:prstGeom>
+        </p:spPr>
+      </p:pic>
+      <p:pic>
+        <p:nvPicPr>
+          <p:cNvPr id="16" name="图片 15" descr="Kunlunxin - Wikipedia">
+            <a:extLst>
+              <a:ext uri="{FF2B5EF4-FFF2-40B4-BE49-F238E27FC236}">
+                <a16:creationId xmlns:a16="http://schemas.microsoft.com/office/drawing/2014/main" id="{2D61D03C-097E-48C4-BA9C-7C5C2BA8FA8A}"/>
               </a:ext>
             </a:extLst>
           </p:cNvPr>
@@ -3987,14 +3992,15 @@
         </p:nvPicPr>
         <p:blipFill>
           <a:blip r:embed="rId20"/>
+          <a:srcRect l="4011" t="7424" r="4929" b="7772"/>
           <a:stretch>
             <a:fillRect/>
           </a:stretch>
         </p:blipFill>
         <p:spPr>
           <a:xfrm>
-            <a:off x="1521938" y="3202672"/>
-            <a:ext cx="874303" cy="575450"/>
+            <a:off x="1473873" y="869459"/>
+            <a:ext cx="1635762" cy="522942"/>
           </a:xfrm>
           <a:prstGeom prst="rect">
             <a:avLst/>
@@ -4003,10 +4009,10 @@
       </p:pic>
       <p:pic>
         <p:nvPicPr>
-          <p:cNvPr id="16" name="图片 15" descr="Kunlunxin - Wikipedia">
-            <a:extLst>
-              <a:ext uri="{FF2B5EF4-FFF2-40B4-BE49-F238E27FC236}">
-                <a16:creationId xmlns:a16="http://schemas.microsoft.com/office/drawing/2014/main" id="{6FB6793E-DA14-6999-9DC6-C6143FD94F88}"/>
+          <p:cNvPr id="21" name="图片 20" descr="世纪华通旗下基金领投贝塔无限新一轮融资，押注消费级通用具身智能">
+            <a:extLst>
+              <a:ext uri="{FF2B5EF4-FFF2-40B4-BE49-F238E27FC236}">
+                <a16:creationId xmlns:a16="http://schemas.microsoft.com/office/drawing/2014/main" id="{0E806B49-9F34-B45F-4683-11CE8089E069}"/>
               </a:ext>
             </a:extLst>
           </p:cNvPr>
@@ -4017,15 +4023,15 @@
         </p:nvPicPr>
         <p:blipFill>
           <a:blip r:embed="rId21"/>
-          <a:srcRect l="4011" t="7424" r="4929" b="7772"/>
+          <a:srcRect l="17712" t="38909" r="17115" b="34818"/>
           <a:stretch>
             <a:fillRect/>
           </a:stretch>
         </p:blipFill>
         <p:spPr>
           <a:xfrm>
-            <a:off x="2675461" y="3238397"/>
-            <a:ext cx="1576512" cy="504000"/>
+            <a:off x="279128" y="3277771"/>
+            <a:ext cx="2021451" cy="468000"/>
           </a:xfrm>
           <a:prstGeom prst="rect">
             <a:avLst/>
@@ -4034,10 +4040,10 @@
       </p:pic>
       <p:pic>
         <p:nvPicPr>
-          <p:cNvPr id="21" name="图片 20" descr="世纪华通旗下基金领投贝塔无限新一轮融资，押注消费级通用具身智能">
-            <a:extLst>
-              <a:ext uri="{FF2B5EF4-FFF2-40B4-BE49-F238E27FC236}">
-                <a16:creationId xmlns:a16="http://schemas.microsoft.com/office/drawing/2014/main" id="{2EA3EE31-223A-BC37-1FCE-B5FC147C6589}"/>
+          <p:cNvPr id="23" name="图片 22">
+            <a:extLst>
+              <a:ext uri="{FF2B5EF4-FFF2-40B4-BE49-F238E27FC236}">
+                <a16:creationId xmlns:a16="http://schemas.microsoft.com/office/drawing/2014/main" id="{B03C9EDA-00D9-B52C-F9AE-4F5F52FF0E5D}"/>
               </a:ext>
             </a:extLst>
           </p:cNvPr>
@@ -4048,15 +4054,15 @@
         </p:nvPicPr>
         <p:blipFill>
           <a:blip r:embed="rId22"/>
-          <a:srcRect l="17712" t="38909" r="17115" b="34818"/>
+          <a:srcRect l="3112" t="33092" r="3700" b="27044"/>
           <a:stretch>
             <a:fillRect/>
           </a:stretch>
         </p:blipFill>
         <p:spPr>
           <a:xfrm>
-            <a:off x="4531192" y="3256397"/>
-            <a:ext cx="2021451" cy="468000"/>
+            <a:off x="7216601" y="2550957"/>
+            <a:ext cx="1040530" cy="403042"/>
           </a:xfrm>
           <a:prstGeom prst="rect">
             <a:avLst/>
@@ -4065,10 +4071,10 @@
       </p:pic>
       <p:pic>
         <p:nvPicPr>
-          <p:cNvPr id="23" name="图片 22">
-            <a:extLst>
-              <a:ext uri="{FF2B5EF4-FFF2-40B4-BE49-F238E27FC236}">
-                <a16:creationId xmlns:a16="http://schemas.microsoft.com/office/drawing/2014/main" id="{98072538-67CC-BE59-9D78-B7CFFDABF7D8}"/>
+          <p:cNvPr id="100" name="Biren Technology" descr="壁仞科技 / BIREN TECHNOLOGY">
+            <a:extLst>
+              <a:ext uri="{FF2B5EF4-FFF2-40B4-BE49-F238E27FC236}">
+                <a16:creationId xmlns:a16="http://schemas.microsoft.com/office/drawing/2014/main" id="{48B33105-2852-5FB5-3CA4-7D35EA6A8A87}"/>
               </a:ext>
             </a:extLst>
           </p:cNvPr>
@@ -4078,35 +4084,10 @@
           <p:nvPr/>
         </p:nvPicPr>
         <p:blipFill>
-          <a:blip r:embed="rId23"/>
-          <a:srcRect l="3112" t="33092" r="3700" b="27044"/>
-          <a:stretch>
-            <a:fillRect/>
-          </a:stretch>
-        </p:blipFill>
-        <p:spPr>
-          <a:xfrm>
-            <a:off x="6831863" y="3256397"/>
-            <a:ext cx="1208232" cy="468000"/>
-          </a:xfrm>
-          <a:prstGeom prst="rect">
-            <a:avLst/>
-          </a:prstGeom>
-        </p:spPr>
-      </p:pic>
-      <p:pic>
-        <p:nvPicPr>
-          <p:cNvPr id="100" name="Biren Technology" descr="壁仞科技 / BIREN TECHNOLOGY"/>
-          <p:cNvPicPr>
-            <a:picLocks noChangeAspect="1"/>
-          </p:cNvPicPr>
-          <p:nvPr/>
-        </p:nvPicPr>
-        <p:blipFill>
-          <a:blip r:embed="rId27">
+          <a:blip>
             <a:extLst>
               <a:ext uri="{96DAC541-7B7A-43D3-8B79-37D633B846F1}">
-                <asvg:svgBlip xmlns:asvg="http://schemas.microsoft.com/office/drawing/2016/SVG/main" r:embed="rId26"/>
+                <asvg:svgBlip xmlns:asvg="http://schemas.microsoft.com/office/drawing/2016/SVG/main" r:embed="rId23"/>
               </a:ext>
             </a:extLst>
           </a:blip>
@@ -4116,18 +4097,61 @@
         </p:blipFill>
         <p:spPr>
           <a:xfrm>
-            <a:off x="8319314" y="3256397"/>
-            <a:ext cx="1638000" cy="468000"/>
+            <a:off x="8022771" y="874324"/>
+            <a:ext cx="1796241" cy="513212"/>
           </a:xfrm>
           <a:prstGeom prst="rect">
             <a:avLst/>
           </a:prstGeom>
         </p:spPr>
       </p:pic>
+      <p:cxnSp>
+        <p:nvCxnSpPr>
+          <p:cNvPr id="20" name="直线连接符 19">
+            <a:extLst>
+              <a:ext uri="{FF2B5EF4-FFF2-40B4-BE49-F238E27FC236}">
+                <a16:creationId xmlns:a16="http://schemas.microsoft.com/office/drawing/2014/main" id="{FF468620-0AC0-2013-3E57-FC8445870CF5}"/>
+              </a:ext>
+            </a:extLst>
+          </p:cNvPr>
+          <p:cNvCxnSpPr/>
+          <p:nvPr/>
+        </p:nvCxnSpPr>
+        <p:spPr>
+          <a:xfrm>
+            <a:off x="240829" y="1661276"/>
+            <a:ext cx="9578183" cy="0"/>
+          </a:xfrm>
+          <a:prstGeom prst="line">
+            <a:avLst/>
+          </a:prstGeom>
+          <a:ln w="12700">
+            <a:solidFill>
+              <a:schemeClr val="bg1">
+                <a:lumMod val="85000"/>
+              </a:schemeClr>
+            </a:solidFill>
+          </a:ln>
+        </p:spPr>
+        <p:style>
+          <a:lnRef idx="1">
+            <a:schemeClr val="accent1"/>
+          </a:lnRef>
+          <a:fillRef idx="0">
+            <a:schemeClr val="accent1"/>
+          </a:fillRef>
+          <a:effectRef idx="0">
+            <a:schemeClr val="accent1"/>
+          </a:effectRef>
+          <a:fontRef idx="minor">
+            <a:schemeClr val="tx1"/>
+          </a:fontRef>
+        </p:style>
+      </p:cxnSp>
     </p:spTree>
     <p:extLst>
       <p:ext uri="{BB962C8B-B14F-4D97-AF65-F5344CB8AC3E}">
-        <p14:creationId xmlns:p14="http://schemas.microsoft.com/office/powerpoint/2010/main" val="1646602237"/>
+        <p14:creationId xmlns:p14="http://schemas.microsoft.com/office/powerpoint/2010/main" val="17039259"/>
       </p:ext>
     </p:extLst>
   </p:cSld>

--- a/pic/adoption_logos/adoption.pptx
+++ b/pic/adoption_logos/adoption.pptx
@@ -3500,7 +3500,7 @@
           <p:nvPr/>
         </p:nvPicPr>
         <p:blipFill>
-          <a:blip>
+          <a:blip r:embed="rId24">
             <a:extLst>
               <a:ext uri="{96DAC541-7B7A-43D3-8B79-37D633B846F1}">
                 <asvg:svgBlip xmlns:asvg="http://schemas.microsoft.com/office/drawing/2016/SVG/main" r:embed="rId7"/>
@@ -3514,8 +3514,8 @@
         </p:blipFill>
         <p:spPr>
           <a:xfrm>
-            <a:off x="3482304" y="131607"/>
-            <a:ext cx="2224351" cy="503706"/>
+            <a:off x="2239284" y="185316"/>
+            <a:ext cx="1750000" cy="396289"/>
           </a:xfrm>
           <a:prstGeom prst="rect">
             <a:avLst/>
@@ -3537,7 +3537,7 @@
           <p:nvPr/>
         </p:nvPicPr>
         <p:blipFill>
-          <a:blip>
+          <a:blip r:embed="rId25">
             <a:extLst>
               <a:ext uri="{96DAC541-7B7A-43D3-8B79-37D633B846F1}">
                 <asvg:svgBlip xmlns:asvg="http://schemas.microsoft.com/office/drawing/2016/SVG/main" r:embed="rId8"/>
@@ -3550,8 +3550,8 @@
         </p:blipFill>
         <p:spPr>
           <a:xfrm>
-            <a:off x="279128" y="167032"/>
-            <a:ext cx="2366279" cy="432856"/>
+            <a:off x="323647" y="223399"/>
+            <a:ext cx="1750000" cy="320122"/>
           </a:xfrm>
           <a:prstGeom prst="rect">
             <a:avLst/>
@@ -3710,7 +3710,7 @@
         </p:blipFill>
         <p:spPr bwMode="auto">
           <a:xfrm>
-            <a:off x="8231195" y="201202"/>
+            <a:off x="6183170" y="201202"/>
             <a:ext cx="1524774" cy="364516"/>
           </a:xfrm>
           <a:prstGeom prst="rect">
@@ -3968,7 +3968,7 @@
         </p:blipFill>
         <p:spPr>
           <a:xfrm>
-            <a:off x="6543552" y="103488"/>
+            <a:off x="4604548" y="103488"/>
             <a:ext cx="850746" cy="559945"/>
           </a:xfrm>
           <a:prstGeom prst="rect">
@@ -4084,7 +4084,7 @@
           <p:nvPr/>
         </p:nvPicPr>
         <p:blipFill>
-          <a:blip>
+          <a:blip r:embed="rId26">
             <a:extLst>
               <a:ext uri="{96DAC541-7B7A-43D3-8B79-37D633B846F1}">
                 <asvg:svgBlip xmlns:asvg="http://schemas.microsoft.com/office/drawing/2016/SVG/main" r:embed="rId23"/>
@@ -4148,6 +4148,36 @@
           </a:fontRef>
         </p:style>
       </p:cxnSp>
+      <p:pic>
+        <p:nvPicPr>
+          <p:cNvPr id="1031" name="MetaX" descr="MetaX 沐曦 — https://www.metax-tech.com/"/>
+          <p:cNvPicPr>
+            <a:picLocks noChangeAspect="1"/>
+          </p:cNvPicPr>
+          <p:nvPr/>
+        </p:nvPicPr>
+        <p:blipFill>
+          <a:blip r:embed="rId27">
+            <a:extLst>
+              <a:ext uri="{96DAC541-7B7A-43D3-8B79-37D633B846F1}">
+                <asvg:svgBlip xmlns:asvg="http://schemas.microsoft.com/office/drawing/2016/SVG/main" r:embed="rId28"/>
+              </a:ext>
+            </a:extLst>
+          </a:blip>
+          <a:stretch>
+            <a:fillRect/>
+          </a:stretch>
+        </p:blipFill>
+        <p:spPr>
+          <a:xfrm>
+            <a:off x="7986194" y="171826"/>
+            <a:ext cx="1750000" cy="423269"/>
+          </a:xfrm>
+          <a:prstGeom prst="rect">
+            <a:avLst/>
+          </a:prstGeom>
+        </p:spPr>
+      </p:pic>
     </p:spTree>
     <p:extLst>
       <p:ext uri="{BB962C8B-B14F-4D97-AF65-F5344CB8AC3E}">
